--- a/pptx/midterm/REMUS_Progress_Slide_9.pptx
+++ b/pptx/midterm/REMUS_Progress_Slide_9.pptx
@@ -5,10 +5,10 @@
     <p:sldMasterId xmlns:r="http://schemas.openxmlformats.org/officeDocument/2006/relationships" id="2147483648" r:id="rId1"/>
   </p:sldMasterIdLst>
   <p:notesMasterIdLst>
-    <p:notesMasterId r:id="Re9cacdc73b424286"/>
+    <p:notesMasterId r:id="Rf3eba1278033405d"/>
   </p:notesMasterIdLst>
   <p:sldIdLst>
-    <p:sldId id="256" r:id="Rddd67e73bdc64804"/>
+    <p:sldId id="256" r:id="R8f7999761b2548bb"/>
   </p:sldIdLst>
   <p:sldSz cx="12192000" cy="6858000" type="screen16x9"/>
   <p:notesSz cx="6858000" cy="9144000"/>
@@ -776,7 +776,7 @@
 
 <file path=ppt/slides/slide1.xml><?xml version="1.0" encoding="utf-8"?>
 <p:sld xmlns:a="http://schemas.openxmlformats.org/drawingml/2006/main" xmlns:p="http://schemas.openxmlformats.org/presentationml/2006/main">
-  <p:cSld>
+  <p:cSld xmlns:a="http://schemas.openxmlformats.org/drawingml/2006/main" xmlns:p="http://schemas.openxmlformats.org/presentationml/2006/main">
     <p:bg>
       <p:bgPr>
         <a:solidFill xmlns:a="http://schemas.openxmlformats.org/drawingml/2006/main">
@@ -814,16 +814,35 @@
             <a:noAutofit/>
           </a:bodyPr>
           <a:lstStyle xmlns:a="http://schemas.openxmlformats.org/drawingml/2006/main"/>
-          <a:p xmlns:a="http://schemas.openxmlformats.org/drawingml/2006/main">
+          <a:p>
+            <a:pPr algn="l">
+              <a:lnSpc>
+                <a:spcPct val="90000"/>
+              </a:lnSpc>
+              <a:defRPr sz="3000" b="1">
+                <a:solidFill>
+                  <a:srgbClr val="183B56"/>
+                </a:solidFill>
+                <a:latin typeface="Arial"/>
+                <a:ea typeface="Arial"/>
+              </a:defRPr>
+            </a:pPr>
             <a:r>
               <a:rPr lang="en-US" sz="3000" b="1">
                 <a:solidFill>
                   <a:srgbClr val="183B56"/>
                 </a:solidFill>
-                <a:latin typeface="Arial"/>
-                <a:ea typeface="Arial"/>
-              </a:rPr>
-              <a:t>9. Scalable Multi-FPGA Runtime</a:t>
+              </a:rPr>
+              <a:t xml:space="preserve">Progress4: Scalable </a:t>
+            </a:r>
+            <a:r>
+              <a:rPr lang="en-US" sz="3000" b="1">
+                <a:solidFill>
+                  <a:srgbClr val="183B56"/>
+                </a:solidFill>
+                <a:latin typeface="Arial"/>
+              </a:rPr>
+              <a:t>Multi-FPGA Runtime</a:t>
             </a:r>
           </a:p>
         </p:txBody>
@@ -1688,45 +1707,6 @@
       </p:sp>
       <p:sp>
         <p:nvSpPr>
-          <p:cNvPr id="100021" name="S09.Direct.LinkCaption"/>
-          <p:cNvSpPr txBox="1"/>
-          <p:nvPr/>
-        </p:nvSpPr>
-        <p:spPr>
-          <a:xfrm>
-            <a:off x="1600200" y="4325112"/>
-            <a:ext cx="3035808" cy="228600"/>
-          </a:xfrm>
-          <a:prstGeom prst="rect">
-            <a:avLst/>
-          </a:prstGeom>
-          <a:noFill/>
-          <a:ln>
-            <a:noFill/>
-          </a:ln>
-        </p:spPr>
-        <p:txBody>
-          <a:bodyPr lIns="0" tIns="0" rIns="0" bIns="0">
-            <a:noAutofit/>
-          </a:bodyPr>
-          <a:lstStyle/>
-          <a:p>
-            <a:pPr algn="ctr"/>
-            <a:r>
-              <a:rPr lang="en-US" sz="1400">
-                <a:solidFill>
-                  <a:srgbClr val="607184"/>
-                </a:solidFill>
-                <a:latin typeface="Arial"/>
-                <a:ea typeface="Arial"/>
-              </a:rPr>
-              <a:t>DUT communication</a:t>
-            </a:r>
-          </a:p>
-        </p:txBody>
-      </p:sp>
-      <p:sp>
-        <p:nvSpPr>
           <p:cNvPr id="100022" name="S09.Direct.Bullet0"/>
           <p:cNvSpPr/>
           <p:nvPr/>
@@ -1845,7 +1825,7 @@
         </p:nvSpPr>
         <p:spPr>
           <a:xfrm>
-            <a:off x="649224" y="5468112"/>
+            <a:off x="649224" y="5456237"/>
             <a:ext cx="5266944" cy="475488"/>
           </a:xfrm>
           <a:prstGeom prst="rect">

--- a/pptx/midterm/REMUS_Progress_Slide_9.pptx
+++ b/pptx/midterm/REMUS_Progress_Slide_9.pptx
@@ -5,10 +5,10 @@
     <p:sldMasterId xmlns:r="http://schemas.openxmlformats.org/officeDocument/2006/relationships" id="2147483648" r:id="rId1"/>
   </p:sldMasterIdLst>
   <p:notesMasterIdLst>
-    <p:notesMasterId r:id="Rf3eba1278033405d"/>
+    <p:notesMasterId r:id="R72e1fdc57bbf41fd"/>
   </p:notesMasterIdLst>
   <p:sldIdLst>
-    <p:sldId id="256" r:id="R8f7999761b2548bb"/>
+    <p:sldId id="256" r:id="R31609c0de12e48f8"/>
   </p:sldIdLst>
   <p:sldSz cx="12192000" cy="6858000" type="screen16x9"/>
   <p:notesSz cx="6858000" cy="9144000"/>
@@ -337,13 +337,13 @@
         <a:srgbClr val="E7E6E6"/>
       </a:lt2>
       <a:accent1>
-        <a:srgbClr val="183B56"/>
+        <a:srgbClr val="C00000"/>
       </a:accent1>
       <a:accent2>
-        <a:srgbClr val="008C95"/>
+        <a:srgbClr val="70AD47"/>
       </a:accent2>
       <a:accent3>
-        <a:srgbClr val="DF973E"/>
+        <a:srgbClr val="ED7D31"/>
       </a:accent3>
       <a:accent4>
         <a:srgbClr val="FFC000"/>
@@ -821,7 +821,7 @@
               </a:lnSpc>
               <a:defRPr sz="3000" b="1">
                 <a:solidFill>
-                  <a:srgbClr val="183B56"/>
+                  <a:srgbClr val="C00000"/>
                 </a:solidFill>
                 <a:latin typeface="Arial"/>
                 <a:ea typeface="Arial"/>
@@ -830,7 +830,7 @@
             <a:r>
               <a:rPr lang="en-US" sz="3000" b="1">
                 <a:solidFill>
-                  <a:srgbClr val="183B56"/>
+                  <a:srgbClr val="C00000"/>
                 </a:solidFill>
               </a:rPr>
               <a:t xml:space="preserve">Progress4: Scalable </a:t>
@@ -838,7 +838,7 @@
             <a:r>
               <a:rPr lang="en-US" sz="3000" b="1">
                 <a:solidFill>
-                  <a:srgbClr val="183B56"/>
+                  <a:srgbClr val="C00000"/>
                 </a:solidFill>
                 <a:latin typeface="Arial"/>
               </a:rPr>
@@ -862,10 +862,12 @@
             <a:avLst/>
           </a:prstGeom>
           <a:solidFill>
-            <a:srgbClr val="008C95"/>
-          </a:solidFill>
-          <a:ln>
-            <a:noFill/>
+            <a:srgbClr val="C55A11"/>
+          </a:solidFill>
+          <a:ln>
+            <a:solidFill>
+              <a:srgbClr val="C55A11"/>
+            </a:solidFill>
           </a:ln>
         </p:spPr>
         <p:txBody>
@@ -876,7 +878,7 @@
           <a:p>
             <a:endParaRPr lang="en-US" sz="1800">
               <a:solidFill>
-                <a:srgbClr val="20354A"/>
+                <a:srgbClr val="C55A11"/>
               </a:solidFill>
               <a:latin typeface="Arial"/>
               <a:ea typeface="Arial"/>
@@ -901,7 +903,7 @@
             </a:avLst>
           </a:prstGeom>
           <a:solidFill>
-            <a:srgbClr val="F1F5F8"/>
+            <a:srgbClr val="F5F5F5"/>
           </a:solidFill>
           <a:ln>
             <a:noFill/>
@@ -915,7 +917,7 @@
           <a:p>
             <a:endParaRPr lang="en-US" sz="1800">
               <a:solidFill>
-                <a:srgbClr val="20354A"/>
+                <a:srgbClr val="1F1F1F"/>
               </a:solidFill>
               <a:latin typeface="Arial"/>
               <a:ea typeface="Arial"/>
@@ -951,7 +953,7 @@
             <a:r>
               <a:rPr lang="en-US" sz="2400" b="1">
                 <a:solidFill>
-                  <a:srgbClr val="183B56"/>
+                  <a:srgbClr val="333333"/>
                 </a:solidFill>
                 <a:latin typeface="Arial"/>
                 <a:ea typeface="Arial"/>
@@ -980,7 +982,7 @@
           </a:solidFill>
           <a:ln w="25400">
             <a:solidFill>
-              <a:srgbClr val="183B56"/>
+              <a:srgbClr val="333333"/>
             </a:solidFill>
           </a:ln>
         </p:spPr>
@@ -994,7 +996,7 @@
             <a:r>
               <a:rPr lang="en-US" sz="2400" b="1">
                 <a:solidFill>
-                  <a:srgbClr val="183B56"/>
+                  <a:srgbClr val="333333"/>
                 </a:solidFill>
                 <a:latin typeface="Arial"/>
                 <a:ea typeface="Arial"/>
@@ -1023,7 +1025,7 @@
           </a:solidFill>
           <a:ln w="25400">
             <a:solidFill>
-              <a:srgbClr val="183B56"/>
+              <a:srgbClr val="333333"/>
             </a:solidFill>
           </a:ln>
         </p:spPr>
@@ -1035,7 +1037,7 @@
           <a:p>
             <a:endParaRPr lang="en-US" sz="1800">
               <a:solidFill>
-                <a:srgbClr val="20354A"/>
+                <a:srgbClr val="1F1F1F"/>
               </a:solidFill>
               <a:latin typeface="Arial"/>
               <a:ea typeface="Arial"/>
@@ -1072,7 +1074,7 @@
             <a:r>
               <a:rPr lang="en-US" sz="1700" b="1">
                 <a:solidFill>
-                  <a:srgbClr val="183B56"/>
+                  <a:srgbClr val="333333"/>
                 </a:solidFill>
                 <a:latin typeface="Arial"/>
                 <a:ea typeface="Arial"/>
@@ -1097,11 +1099,11 @@
             <a:avLst/>
           </a:prstGeom>
           <a:solidFill>
-            <a:srgbClr val="F1F5F8"/>
+            <a:srgbClr val="F5F5F5"/>
           </a:solidFill>
           <a:ln w="8890">
             <a:solidFill>
-              <a:srgbClr val="BDCBD4"/>
+              <a:srgbClr val="D1D1D1"/>
             </a:solidFill>
           </a:ln>
         </p:spPr>
@@ -1115,7 +1117,7 @@
             <a:r>
               <a:rPr lang="en-US" sz="1400">
                 <a:solidFill>
-                  <a:srgbClr val="20354A"/>
+                  <a:srgbClr val="1F1F1F"/>
                 </a:solidFill>
                 <a:latin typeface="Arial"/>
                 <a:ea typeface="Arial"/>
@@ -1128,7 +1130,7 @@
             <a:r>
               <a:rPr lang="en-US" sz="1400">
                 <a:solidFill>
-                  <a:srgbClr val="20354A"/>
+                  <a:srgbClr val="1F1F1F"/>
                 </a:solidFill>
                 <a:latin typeface="Arial"/>
                 <a:ea typeface="Arial"/>
@@ -1153,7 +1155,7 @@
             <a:avLst/>
           </a:prstGeom>
           <a:solidFill>
-            <a:srgbClr val="183B56"/>
+            <a:srgbClr val="333333"/>
           </a:solidFill>
           <a:ln>
             <a:noFill/>
@@ -1167,7 +1169,7 @@
           <a:p>
             <a:endParaRPr lang="en-US" sz="1800">
               <a:solidFill>
-                <a:srgbClr val="20354A"/>
+                <a:srgbClr val="1F1F1F"/>
               </a:solidFill>
               <a:latin typeface="Arial"/>
               <a:ea typeface="Arial"/>
@@ -1203,7 +1205,7 @@
             <a:r>
               <a:rPr lang="en-US" sz="1600" b="1">
                 <a:solidFill>
-                  <a:srgbClr val="183B56"/>
+                  <a:srgbClr val="333333"/>
                 </a:solidFill>
                 <a:latin typeface="Arial"/>
                 <a:ea typeface="Arial"/>
@@ -1228,7 +1230,7 @@
             <a:avLst/>
           </a:prstGeom>
           <a:solidFill>
-            <a:srgbClr val="91A5B5"/>
+            <a:srgbClr val="A0A0A0"/>
           </a:solidFill>
           <a:ln>
             <a:noFill/>
@@ -1242,7 +1244,7 @@
           <a:p>
             <a:endParaRPr lang="en-US" sz="1800">
               <a:solidFill>
-                <a:srgbClr val="20354A"/>
+                <a:srgbClr val="1F1F1F"/>
               </a:solidFill>
               <a:latin typeface="Arial"/>
               <a:ea typeface="Arial"/>
@@ -1269,7 +1271,7 @@
           </a:solidFill>
           <a:ln w="25400">
             <a:solidFill>
-              <a:srgbClr val="183B56"/>
+              <a:srgbClr val="333333"/>
             </a:solidFill>
           </a:ln>
         </p:spPr>
@@ -1281,7 +1283,7 @@
           <a:p>
             <a:endParaRPr lang="en-US" sz="1800">
               <a:solidFill>
-                <a:srgbClr val="20354A"/>
+                <a:srgbClr val="1F1F1F"/>
               </a:solidFill>
               <a:latin typeface="Arial"/>
               <a:ea typeface="Arial"/>
@@ -1318,7 +1320,7 @@
             <a:r>
               <a:rPr lang="en-US" sz="1700" b="1">
                 <a:solidFill>
-                  <a:srgbClr val="183B56"/>
+                  <a:srgbClr val="333333"/>
                 </a:solidFill>
                 <a:latin typeface="Arial"/>
                 <a:ea typeface="Arial"/>
@@ -1343,11 +1345,11 @@
             <a:avLst/>
           </a:prstGeom>
           <a:solidFill>
-            <a:srgbClr val="F1F5F8"/>
+            <a:srgbClr val="F5F5F5"/>
           </a:solidFill>
           <a:ln w="8890">
             <a:solidFill>
-              <a:srgbClr val="BDCBD4"/>
+              <a:srgbClr val="D1D1D1"/>
             </a:solidFill>
           </a:ln>
         </p:spPr>
@@ -1361,7 +1363,7 @@
             <a:r>
               <a:rPr lang="en-US" sz="1400">
                 <a:solidFill>
-                  <a:srgbClr val="20354A"/>
+                  <a:srgbClr val="1F1F1F"/>
                 </a:solidFill>
                 <a:latin typeface="Arial"/>
                 <a:ea typeface="Arial"/>
@@ -1374,7 +1376,7 @@
             <a:r>
               <a:rPr lang="en-US" sz="1400">
                 <a:solidFill>
-                  <a:srgbClr val="20354A"/>
+                  <a:srgbClr val="1F1F1F"/>
                 </a:solidFill>
                 <a:latin typeface="Arial"/>
                 <a:ea typeface="Arial"/>
@@ -1399,7 +1401,7 @@
             <a:avLst/>
           </a:prstGeom>
           <a:solidFill>
-            <a:srgbClr val="183B56"/>
+            <a:srgbClr val="333333"/>
           </a:solidFill>
           <a:ln>
             <a:noFill/>
@@ -1413,7 +1415,7 @@
           <a:p>
             <a:endParaRPr lang="en-US" sz="1800">
               <a:solidFill>
-                <a:srgbClr val="20354A"/>
+                <a:srgbClr val="1F1F1F"/>
               </a:solidFill>
               <a:latin typeface="Arial"/>
               <a:ea typeface="Arial"/>
@@ -1449,7 +1451,7 @@
             <a:r>
               <a:rPr lang="en-US" sz="1600" b="1">
                 <a:solidFill>
-                  <a:srgbClr val="183B56"/>
+                  <a:srgbClr val="333333"/>
                 </a:solidFill>
                 <a:latin typeface="Arial"/>
                 <a:ea typeface="Arial"/>
@@ -1474,7 +1476,7 @@
             <a:avLst/>
           </a:prstGeom>
           <a:solidFill>
-            <a:srgbClr val="91A5B5"/>
+            <a:srgbClr val="A0A0A0"/>
           </a:solidFill>
           <a:ln>
             <a:noFill/>
@@ -1488,7 +1490,7 @@
           <a:p>
             <a:endParaRPr lang="en-US" sz="1800">
               <a:solidFill>
-                <a:srgbClr val="20354A"/>
+                <a:srgbClr val="1F1F1F"/>
               </a:solidFill>
               <a:latin typeface="Arial"/>
               <a:ea typeface="Arial"/>
@@ -1515,7 +1517,7 @@
           </a:solidFill>
           <a:ln w="25400">
             <a:solidFill>
-              <a:srgbClr val="183B56"/>
+              <a:srgbClr val="333333"/>
             </a:solidFill>
           </a:ln>
         </p:spPr>
@@ -1527,7 +1529,7 @@
           <a:p>
             <a:endParaRPr lang="en-US" sz="1800">
               <a:solidFill>
-                <a:srgbClr val="20354A"/>
+                <a:srgbClr val="1F1F1F"/>
               </a:solidFill>
               <a:latin typeface="Arial"/>
               <a:ea typeface="Arial"/>
@@ -1564,7 +1566,7 @@
             <a:r>
               <a:rPr lang="en-US" sz="1700" b="1">
                 <a:solidFill>
-                  <a:srgbClr val="183B56"/>
+                  <a:srgbClr val="333333"/>
                 </a:solidFill>
                 <a:latin typeface="Arial"/>
                 <a:ea typeface="Arial"/>
@@ -1589,11 +1591,11 @@
             <a:avLst/>
           </a:prstGeom>
           <a:solidFill>
-            <a:srgbClr val="F1F5F8"/>
+            <a:srgbClr val="F5F5F5"/>
           </a:solidFill>
           <a:ln w="8890">
             <a:solidFill>
-              <a:srgbClr val="BDCBD4"/>
+              <a:srgbClr val="D1D1D1"/>
             </a:solidFill>
           </a:ln>
         </p:spPr>
@@ -1607,7 +1609,7 @@
             <a:r>
               <a:rPr lang="en-US" sz="1400">
                 <a:solidFill>
-                  <a:srgbClr val="20354A"/>
+                  <a:srgbClr val="1F1F1F"/>
                 </a:solidFill>
                 <a:latin typeface="Arial"/>
                 <a:ea typeface="Arial"/>
@@ -1620,7 +1622,7 @@
             <a:r>
               <a:rPr lang="en-US" sz="1400">
                 <a:solidFill>
-                  <a:srgbClr val="20354A"/>
+                  <a:srgbClr val="1F1F1F"/>
                 </a:solidFill>
                 <a:latin typeface="Arial"/>
                 <a:ea typeface="Arial"/>
@@ -1645,7 +1647,7 @@
             <a:avLst/>
           </a:prstGeom>
           <a:solidFill>
-            <a:srgbClr val="183B56"/>
+            <a:srgbClr val="333333"/>
           </a:solidFill>
           <a:ln>
             <a:noFill/>
@@ -1659,7 +1661,7 @@
           <a:p>
             <a:endParaRPr lang="en-US" sz="1800">
               <a:solidFill>
-                <a:srgbClr val="20354A"/>
+                <a:srgbClr val="1F1F1F"/>
               </a:solidFill>
               <a:latin typeface="Arial"/>
               <a:ea typeface="Arial"/>
@@ -1695,7 +1697,7 @@
             <a:r>
               <a:rPr lang="en-US" sz="1600" b="1">
                 <a:solidFill>
-                  <a:srgbClr val="183B56"/>
+                  <a:srgbClr val="333333"/>
                 </a:solidFill>
                 <a:latin typeface="Arial"/>
                 <a:ea typeface="Arial"/>
@@ -1720,7 +1722,7 @@
             <a:avLst/>
           </a:prstGeom>
           <a:solidFill>
-            <a:srgbClr val="008C95"/>
+            <a:srgbClr val="70AD47"/>
           </a:solidFill>
           <a:ln>
             <a:noFill/>
@@ -1734,7 +1736,7 @@
           <a:p>
             <a:endParaRPr lang="en-US" sz="1800">
               <a:solidFill>
-                <a:srgbClr val="20354A"/>
+                <a:srgbClr val="1F1F1F"/>
               </a:solidFill>
               <a:latin typeface="Arial"/>
               <a:ea typeface="Arial"/>
@@ -1770,7 +1772,7 @@
             <a:r>
               <a:rPr lang="en-US" sz="2200">
                 <a:solidFill>
-                  <a:srgbClr val="20354A"/>
+                  <a:srgbClr val="1F1F1F"/>
                 </a:solidFill>
                 <a:latin typeface="Arial"/>
                 <a:ea typeface="Arial"/>
@@ -1795,7 +1797,7 @@
             <a:avLst/>
           </a:prstGeom>
           <a:solidFill>
-            <a:srgbClr val="008C95"/>
+            <a:srgbClr val="70AD47"/>
           </a:solidFill>
           <a:ln>
             <a:noFill/>
@@ -1809,7 +1811,7 @@
           <a:p>
             <a:endParaRPr lang="en-US" sz="1800">
               <a:solidFill>
-                <a:srgbClr val="20354A"/>
+                <a:srgbClr val="1F1F1F"/>
               </a:solidFill>
               <a:latin typeface="Arial"/>
               <a:ea typeface="Arial"/>
@@ -1845,7 +1847,7 @@
             <a:r>
               <a:rPr lang="en-US" sz="2200">
                 <a:solidFill>
-                  <a:srgbClr val="20354A"/>
+                  <a:srgbClr val="1F1F1F"/>
                 </a:solidFill>
                 <a:latin typeface="Arial"/>
                 <a:ea typeface="Arial"/>
@@ -1872,7 +1874,7 @@
             </a:avLst>
           </a:prstGeom>
           <a:solidFill>
-            <a:srgbClr val="EAF4F3"/>
+            <a:srgbClr val="F1F7EC"/>
           </a:solidFill>
           <a:ln>
             <a:noFill/>
@@ -1886,7 +1888,7 @@
           <a:p>
             <a:endParaRPr lang="en-US" sz="1800">
               <a:solidFill>
-                <a:srgbClr val="20354A"/>
+                <a:srgbClr val="1F1F1F"/>
               </a:solidFill>
               <a:latin typeface="Arial"/>
               <a:ea typeface="Arial"/>
@@ -1922,7 +1924,7 @@
             <a:r>
               <a:rPr lang="en-US" sz="2400" b="1">
                 <a:solidFill>
-                  <a:srgbClr val="183B56"/>
+                  <a:srgbClr val="333333"/>
                 </a:solidFill>
                 <a:latin typeface="Arial"/>
                 <a:ea typeface="Arial"/>
@@ -1951,7 +1953,7 @@
           </a:solidFill>
           <a:ln w="25400">
             <a:solidFill>
-              <a:srgbClr val="183B56"/>
+              <a:srgbClr val="333333"/>
             </a:solidFill>
           </a:ln>
         </p:spPr>
@@ -1965,7 +1967,7 @@
             <a:r>
               <a:rPr lang="en-US" sz="2400" b="1">
                 <a:solidFill>
-                  <a:srgbClr val="183B56"/>
+                  <a:srgbClr val="333333"/>
                 </a:solidFill>
                 <a:latin typeface="Arial"/>
                 <a:ea typeface="Arial"/>
@@ -1994,7 +1996,7 @@
           </a:solidFill>
           <a:ln w="25400">
             <a:solidFill>
-              <a:srgbClr val="008C95"/>
+              <a:srgbClr val="70AD47"/>
             </a:solidFill>
           </a:ln>
         </p:spPr>
@@ -2006,7 +2008,7 @@
           <a:p>
             <a:endParaRPr lang="en-US" sz="1800">
               <a:solidFill>
-                <a:srgbClr val="20354A"/>
+                <a:srgbClr val="1F1F1F"/>
               </a:solidFill>
               <a:latin typeface="Arial"/>
               <a:ea typeface="Arial"/>
@@ -2043,7 +2045,7 @@
             <a:r>
               <a:rPr lang="en-US" sz="1700" b="1">
                 <a:solidFill>
-                  <a:srgbClr val="008C95"/>
+                  <a:srgbClr val="70AD47"/>
                 </a:solidFill>
                 <a:latin typeface="Arial"/>
                 <a:ea typeface="Arial"/>
@@ -2068,11 +2070,11 @@
             <a:avLst/>
           </a:prstGeom>
           <a:solidFill>
-            <a:srgbClr val="F1F5F8"/>
+            <a:srgbClr val="F5F5F5"/>
           </a:solidFill>
           <a:ln w="8890">
             <a:solidFill>
-              <a:srgbClr val="BDCBD4"/>
+              <a:srgbClr val="D1D1D1"/>
             </a:solidFill>
           </a:ln>
         </p:spPr>
@@ -2086,7 +2088,7 @@
             <a:r>
               <a:rPr lang="en-US" sz="1400">
                 <a:solidFill>
-                  <a:srgbClr val="20354A"/>
+                  <a:srgbClr val="1F1F1F"/>
                 </a:solidFill>
                 <a:latin typeface="Arial"/>
                 <a:ea typeface="Arial"/>
@@ -2099,7 +2101,7 @@
             <a:r>
               <a:rPr lang="en-US" sz="1400">
                 <a:solidFill>
-                  <a:srgbClr val="20354A"/>
+                  <a:srgbClr val="1F1F1F"/>
                 </a:solidFill>
                 <a:latin typeface="Arial"/>
                 <a:ea typeface="Arial"/>
@@ -2124,7 +2126,7 @@
             <a:avLst/>
           </a:prstGeom>
           <a:solidFill>
-            <a:srgbClr val="183B56"/>
+            <a:srgbClr val="333333"/>
           </a:solidFill>
           <a:ln>
             <a:noFill/>
@@ -2138,7 +2140,7 @@
           <a:p>
             <a:endParaRPr lang="en-US" sz="1800">
               <a:solidFill>
-                <a:srgbClr val="20354A"/>
+                <a:srgbClr val="1F1F1F"/>
               </a:solidFill>
               <a:latin typeface="Arial"/>
               <a:ea typeface="Arial"/>
@@ -2174,7 +2176,7 @@
             <a:r>
               <a:rPr lang="en-US" sz="1600" b="1">
                 <a:solidFill>
-                  <a:srgbClr val="183B56"/>
+                  <a:srgbClr val="333333"/>
                 </a:solidFill>
                 <a:latin typeface="Arial"/>
                 <a:ea typeface="Arial"/>
@@ -2199,7 +2201,7 @@
             <a:avLst/>
           </a:prstGeom>
           <a:solidFill>
-            <a:srgbClr val="008C95"/>
+            <a:srgbClr val="70AD47"/>
           </a:solidFill>
           <a:ln>
             <a:noFill/>
@@ -2213,7 +2215,7 @@
           <a:p>
             <a:endParaRPr lang="en-US" sz="1800">
               <a:solidFill>
-                <a:srgbClr val="20354A"/>
+                <a:srgbClr val="1F1F1F"/>
               </a:solidFill>
               <a:latin typeface="Arial"/>
               <a:ea typeface="Arial"/>
@@ -2250,7 +2252,7 @@
             <a:r>
               <a:rPr lang="en-US" sz="1200" b="1">
                 <a:solidFill>
-                  <a:srgbClr val="008C95"/>
+                  <a:srgbClr val="70AD47"/>
                 </a:solidFill>
                 <a:latin typeface="Arial"/>
                 <a:ea typeface="Arial"/>
@@ -2279,7 +2281,7 @@
           </a:solidFill>
           <a:ln w="25400">
             <a:solidFill>
-              <a:srgbClr val="183B56"/>
+              <a:srgbClr val="333333"/>
             </a:solidFill>
           </a:ln>
         </p:spPr>
@@ -2291,7 +2293,7 @@
           <a:p>
             <a:endParaRPr lang="en-US" sz="1800">
               <a:solidFill>
-                <a:srgbClr val="20354A"/>
+                <a:srgbClr val="1F1F1F"/>
               </a:solidFill>
               <a:latin typeface="Arial"/>
               <a:ea typeface="Arial"/>
@@ -2328,7 +2330,7 @@
             <a:r>
               <a:rPr lang="en-US" sz="1700" b="1">
                 <a:solidFill>
-                  <a:srgbClr val="183B56"/>
+                  <a:srgbClr val="333333"/>
                 </a:solidFill>
                 <a:latin typeface="Arial"/>
                 <a:ea typeface="Arial"/>
@@ -2353,11 +2355,11 @@
             <a:avLst/>
           </a:prstGeom>
           <a:solidFill>
-            <a:srgbClr val="F1F5F8"/>
+            <a:srgbClr val="F5F5F5"/>
           </a:solidFill>
           <a:ln w="8890">
             <a:solidFill>
-              <a:srgbClr val="BDCBD4"/>
+              <a:srgbClr val="D1D1D1"/>
             </a:solidFill>
           </a:ln>
         </p:spPr>
@@ -2371,7 +2373,7 @@
             <a:r>
               <a:rPr lang="en-US" sz="1400">
                 <a:solidFill>
-                  <a:srgbClr val="20354A"/>
+                  <a:srgbClr val="1F1F1F"/>
                 </a:solidFill>
                 <a:latin typeface="Arial"/>
                 <a:ea typeface="Arial"/>
@@ -2384,7 +2386,7 @@
             <a:r>
               <a:rPr lang="en-US" sz="1400">
                 <a:solidFill>
-                  <a:srgbClr val="20354A"/>
+                  <a:srgbClr val="1F1F1F"/>
                 </a:solidFill>
                 <a:latin typeface="Arial"/>
                 <a:ea typeface="Arial"/>
@@ -2409,7 +2411,7 @@
             <a:avLst/>
           </a:prstGeom>
           <a:solidFill>
-            <a:srgbClr val="008C95"/>
+            <a:srgbClr val="70AD47"/>
           </a:solidFill>
           <a:ln>
             <a:noFill/>
@@ -2423,7 +2425,7 @@
           <a:p>
             <a:endParaRPr lang="en-US" sz="1800">
               <a:solidFill>
-                <a:srgbClr val="20354A"/>
+                <a:srgbClr val="1F1F1F"/>
               </a:solidFill>
               <a:latin typeface="Arial"/>
               <a:ea typeface="Arial"/>
@@ -2460,7 +2462,7 @@
             <a:r>
               <a:rPr lang="en-US" sz="1200" b="1">
                 <a:solidFill>
-                  <a:srgbClr val="008C95"/>
+                  <a:srgbClr val="70AD47"/>
                 </a:solidFill>
                 <a:latin typeface="Arial"/>
                 <a:ea typeface="Arial"/>
@@ -2489,7 +2491,7 @@
           </a:solidFill>
           <a:ln w="25400">
             <a:solidFill>
-              <a:srgbClr val="183B56"/>
+              <a:srgbClr val="333333"/>
             </a:solidFill>
           </a:ln>
         </p:spPr>
@@ -2501,7 +2503,7 @@
           <a:p>
             <a:endParaRPr lang="en-US" sz="1800">
               <a:solidFill>
-                <a:srgbClr val="20354A"/>
+                <a:srgbClr val="1F1F1F"/>
               </a:solidFill>
               <a:latin typeface="Arial"/>
               <a:ea typeface="Arial"/>
@@ -2538,7 +2540,7 @@
             <a:r>
               <a:rPr lang="en-US" sz="1700" b="1">
                 <a:solidFill>
-                  <a:srgbClr val="183B56"/>
+                  <a:srgbClr val="333333"/>
                 </a:solidFill>
                 <a:latin typeface="Arial"/>
                 <a:ea typeface="Arial"/>
@@ -2563,11 +2565,11 @@
             <a:avLst/>
           </a:prstGeom>
           <a:solidFill>
-            <a:srgbClr val="F1F5F8"/>
+            <a:srgbClr val="F5F5F5"/>
           </a:solidFill>
           <a:ln w="8890">
             <a:solidFill>
-              <a:srgbClr val="BDCBD4"/>
+              <a:srgbClr val="D1D1D1"/>
             </a:solidFill>
           </a:ln>
         </p:spPr>
@@ -2581,7 +2583,7 @@
             <a:r>
               <a:rPr lang="en-US" sz="1400">
                 <a:solidFill>
-                  <a:srgbClr val="20354A"/>
+                  <a:srgbClr val="1F1F1F"/>
                 </a:solidFill>
                 <a:latin typeface="Arial"/>
                 <a:ea typeface="Arial"/>
@@ -2594,7 +2596,7 @@
             <a:r>
               <a:rPr lang="en-US" sz="1400">
                 <a:solidFill>
-                  <a:srgbClr val="20354A"/>
+                  <a:srgbClr val="1F1F1F"/>
                 </a:solidFill>
                 <a:latin typeface="Arial"/>
                 <a:ea typeface="Arial"/>
@@ -2619,7 +2621,7 @@
             <a:avLst/>
           </a:prstGeom>
           <a:solidFill>
-            <a:srgbClr val="008C95"/>
+            <a:srgbClr val="70AD47"/>
           </a:solidFill>
           <a:ln>
             <a:noFill/>
@@ -2633,7 +2635,7 @@
           <a:p>
             <a:endParaRPr lang="en-US" sz="1800">
               <a:solidFill>
-                <a:srgbClr val="20354A"/>
+                <a:srgbClr val="1F1F1F"/>
               </a:solidFill>
               <a:latin typeface="Arial"/>
               <a:ea typeface="Arial"/>
@@ -2669,7 +2671,7 @@
             <a:r>
               <a:rPr lang="en-US" sz="2200">
                 <a:solidFill>
-                  <a:srgbClr val="20354A"/>
+                  <a:srgbClr val="1F1F1F"/>
                 </a:solidFill>
                 <a:latin typeface="Arial"/>
                 <a:ea typeface="Arial"/>
@@ -2694,7 +2696,7 @@
             <a:avLst/>
           </a:prstGeom>
           <a:solidFill>
-            <a:srgbClr val="008C95"/>
+            <a:srgbClr val="70AD47"/>
           </a:solidFill>
           <a:ln>
             <a:noFill/>
@@ -2708,7 +2710,7 @@
           <a:p>
             <a:endParaRPr lang="en-US" sz="1800">
               <a:solidFill>
-                <a:srgbClr val="20354A"/>
+                <a:srgbClr val="1F1F1F"/>
               </a:solidFill>
               <a:latin typeface="Arial"/>
               <a:ea typeface="Arial"/>
@@ -2744,7 +2746,7 @@
             <a:r>
               <a:rPr lang="en-US" sz="2200">
                 <a:solidFill>
-                  <a:srgbClr val="20354A"/>
+                  <a:srgbClr val="1F1F1F"/>
                 </a:solidFill>
                 <a:latin typeface="Arial"/>
                 <a:ea typeface="Arial"/>
@@ -2769,7 +2771,7 @@
             <a:avLst/>
           </a:prstGeom>
           <a:solidFill>
-            <a:srgbClr val="008C95"/>
+            <a:srgbClr val="70AD47"/>
           </a:solidFill>
           <a:ln>
             <a:noFill/>
@@ -2783,7 +2785,7 @@
           <a:p>
             <a:endParaRPr lang="en-US" sz="1800">
               <a:solidFill>
-                <a:srgbClr val="20354A"/>
+                <a:srgbClr val="1F1F1F"/>
               </a:solidFill>
               <a:latin typeface="Arial"/>
               <a:ea typeface="Arial"/>
@@ -2819,7 +2821,7 @@
             <a:r>
               <a:rPr lang="en-US" sz="2200">
                 <a:solidFill>
-                  <a:srgbClr val="20354A"/>
+                  <a:srgbClr val="1F1F1F"/>
                 </a:solidFill>
                 <a:latin typeface="Arial"/>
                 <a:ea typeface="Arial"/>
@@ -2858,7 +2860,7 @@
             <a:r>
               <a:rPr lang="en-US" sz="1000">
                 <a:solidFill>
-                  <a:srgbClr val="607184"/>
+                  <a:srgbClr val="898989"/>
                 </a:solidFill>
                 <a:latin typeface="Arial"/>
                 <a:ea typeface="Arial"/>
@@ -2890,13 +2892,13 @@
         <a:srgbClr val="E7E6E6"/>
       </a:lt2>
       <a:accent1>
-        <a:srgbClr val="183B56"/>
+        <a:srgbClr val="C00000"/>
       </a:accent1>
       <a:accent2>
-        <a:srgbClr val="008C95"/>
+        <a:srgbClr val="70AD47"/>
       </a:accent2>
       <a:accent3>
-        <a:srgbClr val="DF973E"/>
+        <a:srgbClr val="ED7D31"/>
       </a:accent3>
       <a:accent4>
         <a:srgbClr val="FFC000"/>
